--- a/analysis/submitted_analyses/attentional_manipulations_choicebias.pptx
+++ b/analysis/submitted_analyses/attentional_manipulations_choicebias.pptx
@@ -2,12 +2,12 @@
 <file path=ppt/presentation.xml><?xml version="1.0" encoding="utf-8"?>
 <p:presentation xmlns:a="http://schemas.openxmlformats.org/drawingml/2006/main" xmlns:r="http://schemas.openxmlformats.org/officeDocument/2006/relationships" xmlns:p="http://schemas.openxmlformats.org/presentationml/2006/main" saveSubsetFonts="1" autoCompressPictures="0">
   <p:sldMasterIdLst>
-    <p:sldMasterId id="2147483720" r:id="rId1"/>
+    <p:sldMasterId id="2147483732" r:id="rId1"/>
   </p:sldMasterIdLst>
   <p:sldIdLst>
     <p:sldId id="257" r:id="rId2"/>
   </p:sldIdLst>
-  <p:sldSz cx="7772400" cy="9326563"/>
+  <p:sldSz cx="7772400" cy="6218238"/>
   <p:notesSz cx="6858000" cy="9144000"/>
   <p:defaultTextStyle>
     <a:defPPr>
@@ -141,8 +141,8 @@
         </p:nvSpPr>
         <p:spPr>
           <a:xfrm>
-            <a:off x="582930" y="1526362"/>
-            <a:ext cx="6606540" cy="3247026"/>
+            <a:off x="582930" y="1017661"/>
+            <a:ext cx="6606540" cy="2164868"/>
           </a:xfrm>
         </p:spPr>
         <p:txBody>
@@ -173,8 +173,8 @@
         </p:nvSpPr>
         <p:spPr>
           <a:xfrm>
-            <a:off x="971550" y="4898605"/>
-            <a:ext cx="5829300" cy="2251760"/>
+            <a:off x="971550" y="3266015"/>
+            <a:ext cx="5829300" cy="1501301"/>
           </a:xfrm>
         </p:spPr>
         <p:txBody>
@@ -243,7 +243,7 @@
           <a:p>
             <a:fld id="{CFC60B5F-2253-DF41-8690-61B53F1555CE}" type="datetimeFigureOut">
               <a:rPr lang="en-US" smtClean="0"/>
-              <a:t>6/14/24</a:t>
+              <a:t>7/2/24</a:t>
             </a:fld>
             <a:endParaRPr lang="en-US"/>
           </a:p>
@@ -294,7 +294,7 @@
     </p:spTree>
     <p:extLst>
       <p:ext uri="{BB962C8B-B14F-4D97-AF65-F5344CB8AC3E}">
-        <p14:creationId xmlns:p14="http://schemas.microsoft.com/office/powerpoint/2010/main" val="2531525504"/>
+        <p14:creationId xmlns:p14="http://schemas.microsoft.com/office/powerpoint/2010/main" val="542564026"/>
       </p:ext>
     </p:extLst>
   </p:cSld>
@@ -413,7 +413,7 @@
           <a:p>
             <a:fld id="{CFC60B5F-2253-DF41-8690-61B53F1555CE}" type="datetimeFigureOut">
               <a:rPr lang="en-US" smtClean="0"/>
-              <a:t>6/14/24</a:t>
+              <a:t>7/2/24</a:t>
             </a:fld>
             <a:endParaRPr lang="en-US"/>
           </a:p>
@@ -464,7 +464,7 @@
     </p:spTree>
     <p:extLst>
       <p:ext uri="{BB962C8B-B14F-4D97-AF65-F5344CB8AC3E}">
-        <p14:creationId xmlns:p14="http://schemas.microsoft.com/office/powerpoint/2010/main" val="3731825516"/>
+        <p14:creationId xmlns:p14="http://schemas.microsoft.com/office/powerpoint/2010/main" val="2304928335"/>
       </p:ext>
     </p:extLst>
   </p:cSld>
@@ -503,8 +503,8 @@
         </p:nvSpPr>
         <p:spPr>
           <a:xfrm>
-            <a:off x="5562124" y="496553"/>
-            <a:ext cx="1675924" cy="7903831"/>
+            <a:off x="5562124" y="331064"/>
+            <a:ext cx="1675924" cy="5269669"/>
           </a:xfrm>
         </p:spPr>
         <p:txBody>
@@ -531,8 +531,8 @@
         </p:nvSpPr>
         <p:spPr>
           <a:xfrm>
-            <a:off x="534353" y="496553"/>
-            <a:ext cx="4930616" cy="7903831"/>
+            <a:off x="534353" y="331064"/>
+            <a:ext cx="4930616" cy="5269669"/>
           </a:xfrm>
         </p:spPr>
         <p:txBody>
@@ -593,7 +593,7 @@
           <a:p>
             <a:fld id="{CFC60B5F-2253-DF41-8690-61B53F1555CE}" type="datetimeFigureOut">
               <a:rPr lang="en-US" smtClean="0"/>
-              <a:t>6/14/24</a:t>
+              <a:t>7/2/24</a:t>
             </a:fld>
             <a:endParaRPr lang="en-US"/>
           </a:p>
@@ -644,7 +644,7 @@
     </p:spTree>
     <p:extLst>
       <p:ext uri="{BB962C8B-B14F-4D97-AF65-F5344CB8AC3E}">
-        <p14:creationId xmlns:p14="http://schemas.microsoft.com/office/powerpoint/2010/main" val="1178322175"/>
+        <p14:creationId xmlns:p14="http://schemas.microsoft.com/office/powerpoint/2010/main" val="10482076"/>
       </p:ext>
     </p:extLst>
   </p:cSld>
@@ -763,7 +763,7 @@
           <a:p>
             <a:fld id="{CFC60B5F-2253-DF41-8690-61B53F1555CE}" type="datetimeFigureOut">
               <a:rPr lang="en-US" smtClean="0"/>
-              <a:t>6/14/24</a:t>
+              <a:t>7/2/24</a:t>
             </a:fld>
             <a:endParaRPr lang="en-US"/>
           </a:p>
@@ -814,7 +814,7 @@
     </p:spTree>
     <p:extLst>
       <p:ext uri="{BB962C8B-B14F-4D97-AF65-F5344CB8AC3E}">
-        <p14:creationId xmlns:p14="http://schemas.microsoft.com/office/powerpoint/2010/main" val="312936331"/>
+        <p14:creationId xmlns:p14="http://schemas.microsoft.com/office/powerpoint/2010/main" val="266871180"/>
       </p:ext>
     </p:extLst>
   </p:cSld>
@@ -853,8 +853,8 @@
         </p:nvSpPr>
         <p:spPr>
           <a:xfrm>
-            <a:off x="530305" y="2325167"/>
-            <a:ext cx="6703695" cy="3879590"/>
+            <a:off x="530305" y="1550243"/>
+            <a:ext cx="6703695" cy="2586614"/>
           </a:xfrm>
         </p:spPr>
         <p:txBody>
@@ -885,8 +885,8 @@
         </p:nvSpPr>
         <p:spPr>
           <a:xfrm>
-            <a:off x="530305" y="6241460"/>
-            <a:ext cx="6703695" cy="2040185"/>
+            <a:off x="530305" y="4161327"/>
+            <a:ext cx="6703695" cy="1360239"/>
           </a:xfrm>
         </p:spPr>
         <p:txBody>
@@ -1007,7 +1007,7 @@
           <a:p>
             <a:fld id="{CFC60B5F-2253-DF41-8690-61B53F1555CE}" type="datetimeFigureOut">
               <a:rPr lang="en-US" smtClean="0"/>
-              <a:t>6/14/24</a:t>
+              <a:t>7/2/24</a:t>
             </a:fld>
             <a:endParaRPr lang="en-US"/>
           </a:p>
@@ -1058,7 +1058,7 @@
     </p:spTree>
     <p:extLst>
       <p:ext uri="{BB962C8B-B14F-4D97-AF65-F5344CB8AC3E}">
-        <p14:creationId xmlns:p14="http://schemas.microsoft.com/office/powerpoint/2010/main" val="1491503944"/>
+        <p14:creationId xmlns:p14="http://schemas.microsoft.com/office/powerpoint/2010/main" val="382602985"/>
       </p:ext>
     </p:extLst>
   </p:cSld>
@@ -1120,8 +1120,8 @@
         </p:nvSpPr>
         <p:spPr>
           <a:xfrm>
-            <a:off x="534353" y="2482765"/>
-            <a:ext cx="3303270" cy="5917619"/>
+            <a:off x="534353" y="1655318"/>
+            <a:ext cx="3303270" cy="3945415"/>
           </a:xfrm>
         </p:spPr>
         <p:txBody>
@@ -1177,8 +1177,8 @@
         </p:nvSpPr>
         <p:spPr>
           <a:xfrm>
-            <a:off x="3934778" y="2482765"/>
-            <a:ext cx="3303270" cy="5917619"/>
+            <a:off x="3934778" y="1655318"/>
+            <a:ext cx="3303270" cy="3945415"/>
           </a:xfrm>
         </p:spPr>
         <p:txBody>
@@ -1239,7 +1239,7 @@
           <a:p>
             <a:fld id="{CFC60B5F-2253-DF41-8690-61B53F1555CE}" type="datetimeFigureOut">
               <a:rPr lang="en-US" smtClean="0"/>
-              <a:t>6/14/24</a:t>
+              <a:t>7/2/24</a:t>
             </a:fld>
             <a:endParaRPr lang="en-US"/>
           </a:p>
@@ -1290,7 +1290,7 @@
     </p:spTree>
     <p:extLst>
       <p:ext uri="{BB962C8B-B14F-4D97-AF65-F5344CB8AC3E}">
-        <p14:creationId xmlns:p14="http://schemas.microsoft.com/office/powerpoint/2010/main" val="2794910688"/>
+        <p14:creationId xmlns:p14="http://schemas.microsoft.com/office/powerpoint/2010/main" val="3910393471"/>
       </p:ext>
     </p:extLst>
   </p:cSld>
@@ -1329,8 +1329,8 @@
         </p:nvSpPr>
         <p:spPr>
           <a:xfrm>
-            <a:off x="535365" y="496555"/>
-            <a:ext cx="6703695" cy="1802704"/>
+            <a:off x="535365" y="331065"/>
+            <a:ext cx="6703695" cy="1201905"/>
           </a:xfrm>
         </p:spPr>
         <p:txBody>
@@ -1357,8 +1357,8 @@
         </p:nvSpPr>
         <p:spPr>
           <a:xfrm>
-            <a:off x="535366" y="2286304"/>
-            <a:ext cx="3288089" cy="1120482"/>
+            <a:off x="535366" y="1524332"/>
+            <a:ext cx="3288089" cy="747052"/>
           </a:xfrm>
         </p:spPr>
         <p:txBody>
@@ -1422,8 +1422,8 @@
         </p:nvSpPr>
         <p:spPr>
           <a:xfrm>
-            <a:off x="535366" y="3406786"/>
-            <a:ext cx="3288089" cy="5010869"/>
+            <a:off x="535366" y="2271384"/>
+            <a:ext cx="3288089" cy="3340864"/>
           </a:xfrm>
         </p:spPr>
         <p:txBody>
@@ -1479,8 +1479,8 @@
         </p:nvSpPr>
         <p:spPr>
           <a:xfrm>
-            <a:off x="3934778" y="2286304"/>
-            <a:ext cx="3304282" cy="1120482"/>
+            <a:off x="3934778" y="1524332"/>
+            <a:ext cx="3304282" cy="747052"/>
           </a:xfrm>
         </p:spPr>
         <p:txBody>
@@ -1544,8 +1544,8 @@
         </p:nvSpPr>
         <p:spPr>
           <a:xfrm>
-            <a:off x="3934778" y="3406786"/>
-            <a:ext cx="3304282" cy="5010869"/>
+            <a:off x="3934778" y="2271384"/>
+            <a:ext cx="3304282" cy="3340864"/>
           </a:xfrm>
         </p:spPr>
         <p:txBody>
@@ -1606,7 +1606,7 @@
           <a:p>
             <a:fld id="{CFC60B5F-2253-DF41-8690-61B53F1555CE}" type="datetimeFigureOut">
               <a:rPr lang="en-US" smtClean="0"/>
-              <a:t>6/14/24</a:t>
+              <a:t>7/2/24</a:t>
             </a:fld>
             <a:endParaRPr lang="en-US"/>
           </a:p>
@@ -1657,7 +1657,7 @@
     </p:spTree>
     <p:extLst>
       <p:ext uri="{BB962C8B-B14F-4D97-AF65-F5344CB8AC3E}">
-        <p14:creationId xmlns:p14="http://schemas.microsoft.com/office/powerpoint/2010/main" val="1661707560"/>
+        <p14:creationId xmlns:p14="http://schemas.microsoft.com/office/powerpoint/2010/main" val="4225220400"/>
       </p:ext>
     </p:extLst>
   </p:cSld>
@@ -1724,7 +1724,7 @@
           <a:p>
             <a:fld id="{CFC60B5F-2253-DF41-8690-61B53F1555CE}" type="datetimeFigureOut">
               <a:rPr lang="en-US" smtClean="0"/>
-              <a:t>6/14/24</a:t>
+              <a:t>7/2/24</a:t>
             </a:fld>
             <a:endParaRPr lang="en-US"/>
           </a:p>
@@ -1775,7 +1775,7 @@
     </p:spTree>
     <p:extLst>
       <p:ext uri="{BB962C8B-B14F-4D97-AF65-F5344CB8AC3E}">
-        <p14:creationId xmlns:p14="http://schemas.microsoft.com/office/powerpoint/2010/main" val="3355245305"/>
+        <p14:creationId xmlns:p14="http://schemas.microsoft.com/office/powerpoint/2010/main" val="2376829711"/>
       </p:ext>
     </p:extLst>
   </p:cSld>
@@ -1819,7 +1819,7 @@
           <a:p>
             <a:fld id="{CFC60B5F-2253-DF41-8690-61B53F1555CE}" type="datetimeFigureOut">
               <a:rPr lang="en-US" smtClean="0"/>
-              <a:t>6/14/24</a:t>
+              <a:t>7/2/24</a:t>
             </a:fld>
             <a:endParaRPr lang="en-US"/>
           </a:p>
@@ -1870,7 +1870,7 @@
     </p:spTree>
     <p:extLst>
       <p:ext uri="{BB962C8B-B14F-4D97-AF65-F5344CB8AC3E}">
-        <p14:creationId xmlns:p14="http://schemas.microsoft.com/office/powerpoint/2010/main" val="3707813"/>
+        <p14:creationId xmlns:p14="http://schemas.microsoft.com/office/powerpoint/2010/main" val="920149490"/>
       </p:ext>
     </p:extLst>
   </p:cSld>
@@ -1909,8 +1909,8 @@
         </p:nvSpPr>
         <p:spPr>
           <a:xfrm>
-            <a:off x="535365" y="621771"/>
-            <a:ext cx="2506801" cy="2176198"/>
+            <a:off x="535365" y="414549"/>
+            <a:ext cx="2506801" cy="1450922"/>
           </a:xfrm>
         </p:spPr>
         <p:txBody>
@@ -1941,8 +1941,8 @@
         </p:nvSpPr>
         <p:spPr>
           <a:xfrm>
-            <a:off x="3304282" y="1342854"/>
-            <a:ext cx="3934778" cy="6627905"/>
+            <a:off x="3304282" y="895313"/>
+            <a:ext cx="3934778" cy="4418979"/>
           </a:xfrm>
         </p:spPr>
         <p:txBody>
@@ -2026,8 +2026,8 @@
         </p:nvSpPr>
         <p:spPr>
           <a:xfrm>
-            <a:off x="535365" y="2797969"/>
-            <a:ext cx="2506801" cy="5183583"/>
+            <a:off x="535365" y="1865471"/>
+            <a:ext cx="2506801" cy="3456017"/>
           </a:xfrm>
         </p:spPr>
         <p:txBody>
@@ -2096,7 +2096,7 @@
           <a:p>
             <a:fld id="{CFC60B5F-2253-DF41-8690-61B53F1555CE}" type="datetimeFigureOut">
               <a:rPr lang="en-US" smtClean="0"/>
-              <a:t>6/14/24</a:t>
+              <a:t>7/2/24</a:t>
             </a:fld>
             <a:endParaRPr lang="en-US"/>
           </a:p>
@@ -2147,7 +2147,7 @@
     </p:spTree>
     <p:extLst>
       <p:ext uri="{BB962C8B-B14F-4D97-AF65-F5344CB8AC3E}">
-        <p14:creationId xmlns:p14="http://schemas.microsoft.com/office/powerpoint/2010/main" val="1144881552"/>
+        <p14:creationId xmlns:p14="http://schemas.microsoft.com/office/powerpoint/2010/main" val="517810161"/>
       </p:ext>
     </p:extLst>
   </p:cSld>
@@ -2186,8 +2186,8 @@
         </p:nvSpPr>
         <p:spPr>
           <a:xfrm>
-            <a:off x="535365" y="621771"/>
-            <a:ext cx="2506801" cy="2176198"/>
+            <a:off x="535365" y="414549"/>
+            <a:ext cx="2506801" cy="1450922"/>
           </a:xfrm>
         </p:spPr>
         <p:txBody>
@@ -2218,8 +2218,8 @@
         </p:nvSpPr>
         <p:spPr>
           <a:xfrm>
-            <a:off x="3304282" y="1342854"/>
-            <a:ext cx="3934778" cy="6627905"/>
+            <a:off x="3304282" y="895313"/>
+            <a:ext cx="3934778" cy="4418979"/>
           </a:xfrm>
         </p:spPr>
         <p:txBody>
@@ -2283,8 +2283,8 @@
         </p:nvSpPr>
         <p:spPr>
           <a:xfrm>
-            <a:off x="535365" y="2797969"/>
-            <a:ext cx="2506801" cy="5183583"/>
+            <a:off x="535365" y="1865471"/>
+            <a:ext cx="2506801" cy="3456017"/>
           </a:xfrm>
         </p:spPr>
         <p:txBody>
@@ -2353,7 +2353,7 @@
           <a:p>
             <a:fld id="{CFC60B5F-2253-DF41-8690-61B53F1555CE}" type="datetimeFigureOut">
               <a:rPr lang="en-US" smtClean="0"/>
-              <a:t>6/14/24</a:t>
+              <a:t>7/2/24</a:t>
             </a:fld>
             <a:endParaRPr lang="en-US"/>
           </a:p>
@@ -2404,7 +2404,7 @@
     </p:spTree>
     <p:extLst>
       <p:ext uri="{BB962C8B-B14F-4D97-AF65-F5344CB8AC3E}">
-        <p14:creationId xmlns:p14="http://schemas.microsoft.com/office/powerpoint/2010/main" val="158575081"/>
+        <p14:creationId xmlns:p14="http://schemas.microsoft.com/office/powerpoint/2010/main" val="1835214455"/>
       </p:ext>
     </p:extLst>
   </p:cSld>
@@ -2448,8 +2448,8 @@
         </p:nvSpPr>
         <p:spPr>
           <a:xfrm>
-            <a:off x="534353" y="496555"/>
-            <a:ext cx="6703695" cy="1802704"/>
+            <a:off x="534353" y="331065"/>
+            <a:ext cx="6703695" cy="1201905"/>
           </a:xfrm>
           <a:prstGeom prst="rect">
             <a:avLst/>
@@ -2481,8 +2481,8 @@
         </p:nvSpPr>
         <p:spPr>
           <a:xfrm>
-            <a:off x="534353" y="2482765"/>
-            <a:ext cx="6703695" cy="5917619"/>
+            <a:off x="534353" y="1655318"/>
+            <a:ext cx="6703695" cy="3945415"/>
           </a:xfrm>
           <a:prstGeom prst="rect">
             <a:avLst/>
@@ -2543,8 +2543,8 @@
         </p:nvSpPr>
         <p:spPr>
           <a:xfrm>
-            <a:off x="534353" y="8644344"/>
-            <a:ext cx="1748790" cy="496553"/>
+            <a:off x="534353" y="5763387"/>
+            <a:ext cx="1748790" cy="331064"/>
           </a:xfrm>
           <a:prstGeom prst="rect">
             <a:avLst/>
@@ -2566,7 +2566,7 @@
           <a:p>
             <a:fld id="{CFC60B5F-2253-DF41-8690-61B53F1555CE}" type="datetimeFigureOut">
               <a:rPr lang="en-US" smtClean="0"/>
-              <a:t>6/14/24</a:t>
+              <a:t>7/2/24</a:t>
             </a:fld>
             <a:endParaRPr lang="en-US"/>
           </a:p>
@@ -2584,8 +2584,8 @@
         </p:nvSpPr>
         <p:spPr>
           <a:xfrm>
-            <a:off x="2574608" y="8644344"/>
-            <a:ext cx="2623185" cy="496553"/>
+            <a:off x="2574608" y="5763387"/>
+            <a:ext cx="2623185" cy="331064"/>
           </a:xfrm>
           <a:prstGeom prst="rect">
             <a:avLst/>
@@ -2621,8 +2621,8 @@
         </p:nvSpPr>
         <p:spPr>
           <a:xfrm>
-            <a:off x="5489258" y="8644344"/>
-            <a:ext cx="1748790" cy="496553"/>
+            <a:off x="5489258" y="5763387"/>
+            <a:ext cx="1748790" cy="331064"/>
           </a:xfrm>
           <a:prstGeom prst="rect">
             <a:avLst/>
@@ -2653,23 +2653,23 @@
     </p:spTree>
     <p:extLst>
       <p:ext uri="{BB962C8B-B14F-4D97-AF65-F5344CB8AC3E}">
-        <p14:creationId xmlns:p14="http://schemas.microsoft.com/office/powerpoint/2010/main" val="3258342712"/>
+        <p14:creationId xmlns:p14="http://schemas.microsoft.com/office/powerpoint/2010/main" val="4158314363"/>
       </p:ext>
     </p:extLst>
   </p:cSld>
   <p:clrMap bg1="lt1" tx1="dk1" bg2="lt2" tx2="dk2" accent1="accent1" accent2="accent2" accent3="accent3" accent4="accent4" accent5="accent5" accent6="accent6" hlink="hlink" folHlink="folHlink"/>
   <p:sldLayoutIdLst>
-    <p:sldLayoutId id="2147483721" r:id="rId1"/>
-    <p:sldLayoutId id="2147483722" r:id="rId2"/>
-    <p:sldLayoutId id="2147483723" r:id="rId3"/>
-    <p:sldLayoutId id="2147483724" r:id="rId4"/>
-    <p:sldLayoutId id="2147483725" r:id="rId5"/>
-    <p:sldLayoutId id="2147483726" r:id="rId6"/>
-    <p:sldLayoutId id="2147483727" r:id="rId7"/>
-    <p:sldLayoutId id="2147483728" r:id="rId8"/>
-    <p:sldLayoutId id="2147483729" r:id="rId9"/>
-    <p:sldLayoutId id="2147483730" r:id="rId10"/>
-    <p:sldLayoutId id="2147483731" r:id="rId11"/>
+    <p:sldLayoutId id="2147483733" r:id="rId1"/>
+    <p:sldLayoutId id="2147483734" r:id="rId2"/>
+    <p:sldLayoutId id="2147483735" r:id="rId3"/>
+    <p:sldLayoutId id="2147483736" r:id="rId4"/>
+    <p:sldLayoutId id="2147483737" r:id="rId5"/>
+    <p:sldLayoutId id="2147483738" r:id="rId6"/>
+    <p:sldLayoutId id="2147483739" r:id="rId7"/>
+    <p:sldLayoutId id="2147483740" r:id="rId8"/>
+    <p:sldLayoutId id="2147483741" r:id="rId9"/>
+    <p:sldLayoutId id="2147483742" r:id="rId10"/>
+    <p:sldLayoutId id="2147483743" r:id="rId11"/>
   </p:sldLayoutIdLst>
   <p:txStyles>
     <p:titleStyle>
@@ -2993,7 +2993,7 @@
         </p:blipFill>
         <p:spPr>
           <a:xfrm>
-            <a:off x="0" y="0"/>
+            <a:off x="0" y="477"/>
             <a:ext cx="7772400" cy="3108960"/>
           </a:xfrm>
           <a:prstGeom prst="rect">
@@ -3023,37 +3023,7 @@
         </p:blipFill>
         <p:spPr>
           <a:xfrm>
-            <a:off x="0" y="3108801"/>
-            <a:ext cx="7772400" cy="3108960"/>
-          </a:xfrm>
-          <a:prstGeom prst="rect">
-            <a:avLst/>
-          </a:prstGeom>
-        </p:spPr>
-      </p:pic>
-      <p:pic>
-        <p:nvPicPr>
-          <p:cNvPr id="10" name="Picture 9">
-            <a:extLst>
-              <a:ext uri="{FF2B5EF4-FFF2-40B4-BE49-F238E27FC236}">
-                <a16:creationId xmlns:a16="http://schemas.microsoft.com/office/drawing/2014/main" id="{86A2861D-1F0A-712E-C31B-BE8CA6340C52}"/>
-              </a:ext>
-            </a:extLst>
-          </p:cNvPr>
-          <p:cNvPicPr>
-            <a:picLocks noChangeAspect="1"/>
-          </p:cNvPicPr>
-          <p:nvPr/>
-        </p:nvPicPr>
-        <p:blipFill>
-          <a:blip r:embed="rId4"/>
-          <a:stretch>
-            <a:fillRect/>
-          </a:stretch>
-        </p:blipFill>
-        <p:spPr>
-          <a:xfrm>
-            <a:off x="0" y="6217602"/>
+            <a:off x="0" y="3109278"/>
             <a:ext cx="7772400" cy="3108960"/>
           </a:xfrm>
           <a:prstGeom prst="rect">
